--- a/assets/powerpoints/A4-nommer-et-classer-un-probleme.pptx
+++ b/assets/powerpoints/A4-nommer-et-classer-un-probleme.pptx
@@ -936,7 +936,7 @@
           <a:lstStyle/>
           <a:p>
             <a:r>
-              <a:t>Rendre les billets de A1 en début de séance pour que chacun retrouve sa phrase. Fin du bloc A : le groupe est prêt pour la tâche 1.</a:t>
+              <a:t>Rendre les billets de A1 en début de séance pour que chacun retrouve sa phrase. Fin du bloc A : le groupe est prêt pour le défi 1.</a:t>
             </a:r>
           </a:p>
         </p:txBody>
